--- a/assets/powerpoints/module-probleme/C4-trois-facons-d-habiter-au-quebec.pptx
+++ b/assets/powerpoints/module-probleme/C4-trois-facons-d-habiter-au-quebec.pptx
@@ -4578,7 +4578,7 @@
                 </a:solidFill>
                 <a:latin typeface="Verdana"/>
               </a:rPr>
-              <a:t>SÉANCE C4  ·  MODULE 9</a:t>
+              <a:t>SÉANCE C4  ·  MODULE 10</a:t>
             </a:r>
           </a:p>
         </p:txBody>

--- a/assets/powerpoints/module-probleme/C4-trois-facons-d-habiter-au-quebec.pptx
+++ b/assets/powerpoints/module-probleme/C4-trois-facons-d-habiter-au-quebec.pptx
@@ -4574,7 +4574,7 @@
             <a:r>
               <a:rPr sz="1300" b="1" i="0" spc="156">
                 <a:solidFill>
-                  <a:srgbClr val="166534"/>
+                  <a:srgbClr val="A5335F"/>
                 </a:solidFill>
                 <a:latin typeface="Verdana"/>
               </a:rPr>
@@ -4914,7 +4914,7 @@
             <a:r>
               <a:rPr sz="1300" b="1" i="0" spc="156">
                 <a:solidFill>
-                  <a:srgbClr val="166534"/>
+                  <a:srgbClr val="A5335F"/>
                 </a:solidFill>
                 <a:latin typeface="Verdana"/>
               </a:rPr>
@@ -5734,7 +5734,7 @@
             <a:r>
               <a:rPr sz="1300" b="1" i="0" spc="156">
                 <a:solidFill>
-                  <a:srgbClr val="166534"/>
+                  <a:srgbClr val="A5335F"/>
                 </a:solidFill>
                 <a:latin typeface="Verdana"/>
               </a:rPr>
@@ -6283,7 +6283,7 @@
             <a:r>
               <a:rPr sz="1300" b="1" i="0" spc="156">
                 <a:solidFill>
-                  <a:srgbClr val="166534"/>
+                  <a:srgbClr val="A5335F"/>
                 </a:solidFill>
                 <a:latin typeface="Verdana"/>
               </a:rPr>
@@ -6832,7 +6832,7 @@
             <a:r>
               <a:rPr sz="1300" b="1" i="0" spc="156">
                 <a:solidFill>
-                  <a:srgbClr val="166534"/>
+                  <a:srgbClr val="A5335F"/>
                 </a:solidFill>
                 <a:latin typeface="Verdana"/>
               </a:rPr>
@@ -6982,7 +6982,7 @@
             </a:avLst>
           </a:prstGeom>
           <a:solidFill>
-            <a:srgbClr val="E3F1E7"/>
+            <a:srgbClr val="FCE9F0"/>
           </a:solidFill>
           <a:ln>
             <a:noFill/>
@@ -7039,7 +7039,7 @@
             <a:r>
               <a:rPr sz="1500" b="1" i="0">
                 <a:solidFill>
-                  <a:srgbClr val="166534"/>
+                  <a:srgbClr val="A5335F"/>
                 </a:solidFill>
                 <a:latin typeface="Verdana"/>
               </a:rPr>
@@ -7150,7 +7150,7 @@
             </a:avLst>
           </a:prstGeom>
           <a:solidFill>
-            <a:srgbClr val="E3F1E7"/>
+            <a:srgbClr val="FCE9F0"/>
           </a:solidFill>
           <a:ln>
             <a:noFill/>
@@ -7207,7 +7207,7 @@
             <a:r>
               <a:rPr sz="1500" b="1" i="0">
                 <a:solidFill>
-                  <a:srgbClr val="166534"/>
+                  <a:srgbClr val="A5335F"/>
                 </a:solidFill>
                 <a:latin typeface="Verdana"/>
               </a:rPr>
@@ -7318,7 +7318,7 @@
             </a:avLst>
           </a:prstGeom>
           <a:solidFill>
-            <a:srgbClr val="E3F1E7"/>
+            <a:srgbClr val="FCE9F0"/>
           </a:solidFill>
           <a:ln>
             <a:noFill/>
@@ -7375,7 +7375,7 @@
             <a:r>
               <a:rPr sz="1500" b="1" i="0">
                 <a:solidFill>
-                  <a:srgbClr val="166534"/>
+                  <a:srgbClr val="A5335F"/>
                 </a:solidFill>
                 <a:latin typeface="Verdana"/>
               </a:rPr>
@@ -7486,7 +7486,7 @@
             </a:avLst>
           </a:prstGeom>
           <a:solidFill>
-            <a:srgbClr val="E3F1E7"/>
+            <a:srgbClr val="FCE9F0"/>
           </a:solidFill>
           <a:ln>
             <a:noFill/>
@@ -7543,7 +7543,7 @@
             <a:r>
               <a:rPr sz="1500" b="1" i="0">
                 <a:solidFill>
-                  <a:srgbClr val="166534"/>
+                  <a:srgbClr val="A5335F"/>
                 </a:solidFill>
                 <a:latin typeface="Verdana"/>
               </a:rPr>
@@ -7654,7 +7654,7 @@
             </a:avLst>
           </a:prstGeom>
           <a:solidFill>
-            <a:srgbClr val="E3F1E7"/>
+            <a:srgbClr val="FCE9F0"/>
           </a:solidFill>
           <a:ln>
             <a:noFill/>
@@ -7711,7 +7711,7 @@
             <a:r>
               <a:rPr sz="1500" b="1" i="0">
                 <a:solidFill>
-                  <a:srgbClr val="166534"/>
+                  <a:srgbClr val="A5335F"/>
                 </a:solidFill>
                 <a:latin typeface="Verdana"/>
               </a:rPr>
@@ -7822,7 +7822,7 @@
             </a:avLst>
           </a:prstGeom>
           <a:solidFill>
-            <a:srgbClr val="E3F1E7"/>
+            <a:srgbClr val="FCE9F0"/>
           </a:solidFill>
           <a:ln>
             <a:noFill/>
@@ -7879,7 +7879,7 @@
             <a:r>
               <a:rPr sz="1500" b="1" i="0">
                 <a:solidFill>
-                  <a:srgbClr val="166534"/>
+                  <a:srgbClr val="A5335F"/>
                 </a:solidFill>
                 <a:latin typeface="Verdana"/>
               </a:rPr>
@@ -8095,7 +8095,7 @@
             <a:r>
               <a:rPr sz="1300" b="1" i="0" spc="156">
                 <a:solidFill>
-                  <a:srgbClr val="166534"/>
+                  <a:srgbClr val="A5335F"/>
                 </a:solidFill>
                 <a:latin typeface="Verdana"/>
               </a:rPr>
@@ -8245,7 +8245,7 @@
             </a:avLst>
           </a:prstGeom>
           <a:solidFill>
-            <a:srgbClr val="E3F1E7"/>
+            <a:srgbClr val="FCE9F0"/>
           </a:solidFill>
           <a:ln>
             <a:noFill/>
@@ -8302,7 +8302,7 @@
             <a:r>
               <a:rPr sz="1500" b="1" i="0">
                 <a:solidFill>
-                  <a:srgbClr val="166534"/>
+                  <a:srgbClr val="A5335F"/>
                 </a:solidFill>
                 <a:latin typeface="Verdana"/>
               </a:rPr>
@@ -8422,7 +8422,7 @@
             </a:avLst>
           </a:prstGeom>
           <a:solidFill>
-            <a:srgbClr val="E3F1E7"/>
+            <a:srgbClr val="FCE9F0"/>
           </a:solidFill>
           <a:ln>
             <a:noFill/>
@@ -8479,7 +8479,7 @@
             <a:r>
               <a:rPr sz="1500" b="1" i="0">
                 <a:solidFill>
-                  <a:srgbClr val="166534"/>
+                  <a:srgbClr val="A5335F"/>
                 </a:solidFill>
                 <a:latin typeface="Verdana"/>
               </a:rPr>
@@ -8599,7 +8599,7 @@
             </a:avLst>
           </a:prstGeom>
           <a:solidFill>
-            <a:srgbClr val="E3F1E7"/>
+            <a:srgbClr val="FCE9F0"/>
           </a:solidFill>
           <a:ln>
             <a:noFill/>
@@ -8656,7 +8656,7 @@
             <a:r>
               <a:rPr sz="1500" b="1" i="0">
                 <a:solidFill>
-                  <a:srgbClr val="166534"/>
+                  <a:srgbClr val="A5335F"/>
                 </a:solidFill>
                 <a:latin typeface="Verdana"/>
               </a:rPr>
@@ -8776,7 +8776,7 @@
             </a:avLst>
           </a:prstGeom>
           <a:solidFill>
-            <a:srgbClr val="E3F1E7"/>
+            <a:srgbClr val="FCE9F0"/>
           </a:solidFill>
           <a:ln>
             <a:noFill/>
@@ -8833,7 +8833,7 @@
             <a:r>
               <a:rPr sz="1500" b="1" i="0">
                 <a:solidFill>
-                  <a:srgbClr val="166534"/>
+                  <a:srgbClr val="A5335F"/>
                 </a:solidFill>
                 <a:latin typeface="Verdana"/>
               </a:rPr>
@@ -8953,7 +8953,7 @@
             </a:avLst>
           </a:prstGeom>
           <a:solidFill>
-            <a:srgbClr val="E3F1E7"/>
+            <a:srgbClr val="FCE9F0"/>
           </a:solidFill>
           <a:ln>
             <a:noFill/>
@@ -9010,7 +9010,7 @@
             <a:r>
               <a:rPr sz="1500" b="1" i="0">
                 <a:solidFill>
-                  <a:srgbClr val="166534"/>
+                  <a:srgbClr val="A5335F"/>
                 </a:solidFill>
                 <a:latin typeface="Verdana"/>
               </a:rPr>
@@ -9130,7 +9130,7 @@
             </a:avLst>
           </a:prstGeom>
           <a:solidFill>
-            <a:srgbClr val="E3F1E7"/>
+            <a:srgbClr val="FCE9F0"/>
           </a:solidFill>
           <a:ln>
             <a:noFill/>
@@ -9187,7 +9187,7 @@
             <a:r>
               <a:rPr sz="1500" b="1" i="0">
                 <a:solidFill>
-                  <a:srgbClr val="166534"/>
+                  <a:srgbClr val="A5335F"/>
                 </a:solidFill>
                 <a:latin typeface="Verdana"/>
               </a:rPr>
@@ -9875,7 +9875,7 @@
             <a:r>
               <a:rPr sz="1300" b="1" i="0" spc="156">
                 <a:solidFill>
-                  <a:srgbClr val="166534"/>
+                  <a:srgbClr val="A5335F"/>
                 </a:solidFill>
                 <a:latin typeface="Verdana"/>
               </a:rPr>
@@ -9986,7 +9986,7 @@
             </a:avLst>
           </a:prstGeom>
           <a:solidFill>
-            <a:srgbClr val="E3F1E7"/>
+            <a:srgbClr val="FCE9F0"/>
           </a:solidFill>
           <a:ln>
             <a:noFill/>
@@ -10043,7 +10043,7 @@
             <a:r>
               <a:rPr sz="1500" b="1" i="0">
                 <a:solidFill>
-                  <a:srgbClr val="166534"/>
+                  <a:srgbClr val="A5335F"/>
                 </a:solidFill>
                 <a:latin typeface="Verdana"/>
               </a:rPr>
@@ -10154,7 +10154,7 @@
             </a:avLst>
           </a:prstGeom>
           <a:solidFill>
-            <a:srgbClr val="E3F1E7"/>
+            <a:srgbClr val="FCE9F0"/>
           </a:solidFill>
           <a:ln>
             <a:noFill/>
@@ -10211,7 +10211,7 @@
             <a:r>
               <a:rPr sz="1500" b="1" i="0">
                 <a:solidFill>
-                  <a:srgbClr val="166534"/>
+                  <a:srgbClr val="A5335F"/>
                 </a:solidFill>
                 <a:latin typeface="Verdana"/>
               </a:rPr>
@@ -10322,7 +10322,7 @@
             </a:avLst>
           </a:prstGeom>
           <a:solidFill>
-            <a:srgbClr val="E3F1E7"/>
+            <a:srgbClr val="FCE9F0"/>
           </a:solidFill>
           <a:ln>
             <a:noFill/>
@@ -10379,7 +10379,7 @@
             <a:r>
               <a:rPr sz="1500" b="1" i="0">
                 <a:solidFill>
-                  <a:srgbClr val="166534"/>
+                  <a:srgbClr val="A5335F"/>
                 </a:solidFill>
                 <a:latin typeface="Verdana"/>
               </a:rPr>
@@ -10490,7 +10490,7 @@
             </a:avLst>
           </a:prstGeom>
           <a:solidFill>
-            <a:srgbClr val="E3F1E7"/>
+            <a:srgbClr val="FCE9F0"/>
           </a:solidFill>
           <a:ln>
             <a:noFill/>
@@ -10547,7 +10547,7 @@
             <a:r>
               <a:rPr sz="1500" b="1" i="0">
                 <a:solidFill>
-                  <a:srgbClr val="166534"/>
+                  <a:srgbClr val="A5335F"/>
                 </a:solidFill>
                 <a:latin typeface="Verdana"/>
               </a:rPr>
@@ -10763,7 +10763,7 @@
             <a:r>
               <a:rPr sz="1300" b="1" i="0" spc="156">
                 <a:solidFill>
-                  <a:srgbClr val="166534"/>
+                  <a:srgbClr val="A5335F"/>
                 </a:solidFill>
                 <a:latin typeface="Verdana"/>
               </a:rPr>
@@ -10872,7 +10872,7 @@
             <a:avLst/>
           </a:prstGeom>
           <a:solidFill>
-            <a:srgbClr val="166534"/>
+            <a:srgbClr val="A5335F"/>
           </a:solidFill>
           <a:ln>
             <a:noFill/>
@@ -10999,7 +10999,7 @@
             <a:avLst/>
           </a:prstGeom>
           <a:solidFill>
-            <a:srgbClr val="166534"/>
+            <a:srgbClr val="A5335F"/>
           </a:solidFill>
           <a:ln>
             <a:noFill/>
@@ -11126,7 +11126,7 @@
             <a:avLst/>
           </a:prstGeom>
           <a:solidFill>
-            <a:srgbClr val="166534"/>
+            <a:srgbClr val="A5335F"/>
           </a:solidFill>
           <a:ln>
             <a:noFill/>
@@ -11253,7 +11253,7 @@
             <a:avLst/>
           </a:prstGeom>
           <a:solidFill>
-            <a:srgbClr val="166534"/>
+            <a:srgbClr val="A5335F"/>
           </a:solidFill>
           <a:ln>
             <a:noFill/>
@@ -11487,7 +11487,7 @@
             <a:r>
               <a:rPr sz="1300" b="1" i="0" spc="156">
                 <a:solidFill>
-                  <a:srgbClr val="166534"/>
+                  <a:srgbClr val="A5335F"/>
                 </a:solidFill>
                 <a:latin typeface="Verdana"/>
               </a:rPr>
@@ -11767,7 +11767,7 @@
             <a:r>
               <a:rPr sz="1800" b="1" i="0">
                 <a:solidFill>
-                  <a:srgbClr val="166534"/>
+                  <a:srgbClr val="A5335F"/>
                 </a:solidFill>
                 <a:latin typeface="Verdana"/>
               </a:rPr>
@@ -11926,7 +11926,7 @@
             <a:r>
               <a:rPr sz="1800" b="1" i="0">
                 <a:solidFill>
-                  <a:srgbClr val="166534"/>
+                  <a:srgbClr val="A5335F"/>
                 </a:solidFill>
                 <a:latin typeface="Verdana"/>
               </a:rPr>
@@ -12085,7 +12085,7 @@
             <a:r>
               <a:rPr sz="1800" b="1" i="0">
                 <a:solidFill>
-                  <a:srgbClr val="166534"/>
+                  <a:srgbClr val="A5335F"/>
                 </a:solidFill>
                 <a:latin typeface="Verdana"/>
               </a:rPr>
@@ -12386,7 +12386,7 @@
             <a:r>
               <a:rPr sz="1300" b="1" i="0" spc="156">
                 <a:solidFill>
-                  <a:srgbClr val="166534"/>
+                  <a:srgbClr val="A5335F"/>
                 </a:solidFill>
                 <a:latin typeface="Verdana"/>
               </a:rPr>
@@ -12666,7 +12666,7 @@
             <a:r>
               <a:rPr sz="1800" b="1" i="0">
                 <a:solidFill>
-                  <a:srgbClr val="166534"/>
+                  <a:srgbClr val="A5335F"/>
                 </a:solidFill>
                 <a:latin typeface="Verdana"/>
               </a:rPr>
@@ -12825,7 +12825,7 @@
             <a:r>
               <a:rPr sz="1800" b="1" i="0">
                 <a:solidFill>
-                  <a:srgbClr val="166534"/>
+                  <a:srgbClr val="A5335F"/>
                 </a:solidFill>
                 <a:latin typeface="Verdana"/>
               </a:rPr>
@@ -12984,7 +12984,7 @@
             <a:r>
               <a:rPr sz="1800" b="1" i="0">
                 <a:solidFill>
-                  <a:srgbClr val="166534"/>
+                  <a:srgbClr val="A5335F"/>
                 </a:solidFill>
                 <a:latin typeface="Verdana"/>
               </a:rPr>
@@ -13285,7 +13285,7 @@
             <a:r>
               <a:rPr sz="1300" b="1" i="0" spc="156">
                 <a:solidFill>
-                  <a:srgbClr val="166534"/>
+                  <a:srgbClr val="A5335F"/>
                 </a:solidFill>
                 <a:latin typeface="Verdana"/>
               </a:rPr>
@@ -13311,7 +13311,7 @@
             </a:avLst>
           </a:prstGeom>
           <a:solidFill>
-            <a:srgbClr val="E3F1E7"/>
+            <a:srgbClr val="FCE9F0"/>
           </a:solidFill>
           <a:ln w="12700">
             <a:solidFill>
@@ -13632,7 +13632,7 @@
             <a:r>
               <a:rPr sz="1300" b="1" i="0" spc="156">
                 <a:solidFill>
-                  <a:srgbClr val="166534"/>
+                  <a:srgbClr val="A5335F"/>
                 </a:solidFill>
                 <a:latin typeface="Verdana"/>
               </a:rPr>
@@ -13658,7 +13658,7 @@
             </a:avLst>
           </a:prstGeom>
           <a:solidFill>
-            <a:srgbClr val="E3F1E7"/>
+            <a:srgbClr val="FCE9F0"/>
           </a:solidFill>
           <a:ln w="12700">
             <a:solidFill>
@@ -13979,7 +13979,7 @@
             <a:r>
               <a:rPr sz="1300" b="1" i="0" spc="156">
                 <a:solidFill>
-                  <a:srgbClr val="166534"/>
+                  <a:srgbClr val="A5335F"/>
                 </a:solidFill>
                 <a:latin typeface="Verdana"/>
               </a:rPr>
@@ -14129,7 +14129,7 @@
             </a:avLst>
           </a:prstGeom>
           <a:solidFill>
-            <a:srgbClr val="E3F1E7"/>
+            <a:srgbClr val="FCE9F0"/>
           </a:solidFill>
           <a:ln>
             <a:noFill/>
@@ -14186,7 +14186,7 @@
             <a:r>
               <a:rPr sz="1500" b="1" i="0">
                 <a:solidFill>
-                  <a:srgbClr val="166534"/>
+                  <a:srgbClr val="A5335F"/>
                 </a:solidFill>
                 <a:latin typeface="Verdana"/>
               </a:rPr>
@@ -14297,7 +14297,7 @@
             </a:avLst>
           </a:prstGeom>
           <a:solidFill>
-            <a:srgbClr val="E3F1E7"/>
+            <a:srgbClr val="FCE9F0"/>
           </a:solidFill>
           <a:ln>
             <a:noFill/>
@@ -14354,7 +14354,7 @@
             <a:r>
               <a:rPr sz="1500" b="1" i="0">
                 <a:solidFill>
-                  <a:srgbClr val="166534"/>
+                  <a:srgbClr val="A5335F"/>
                 </a:solidFill>
                 <a:latin typeface="Verdana"/>
               </a:rPr>
@@ -14465,7 +14465,7 @@
             </a:avLst>
           </a:prstGeom>
           <a:solidFill>
-            <a:srgbClr val="E3F1E7"/>
+            <a:srgbClr val="FCE9F0"/>
           </a:solidFill>
           <a:ln>
             <a:noFill/>
@@ -14522,7 +14522,7 @@
             <a:r>
               <a:rPr sz="1500" b="1" i="0">
                 <a:solidFill>
-                  <a:srgbClr val="166534"/>
+                  <a:srgbClr val="A5335F"/>
                 </a:solidFill>
                 <a:latin typeface="Verdana"/>
               </a:rPr>
@@ -14738,7 +14738,7 @@
             <a:r>
               <a:rPr sz="1300" b="1" i="0" spc="156">
                 <a:solidFill>
-                  <a:srgbClr val="166534"/>
+                  <a:srgbClr val="A5335F"/>
                 </a:solidFill>
                 <a:latin typeface="Verdana"/>
               </a:rPr>
@@ -14888,7 +14888,7 @@
             </a:avLst>
           </a:prstGeom>
           <a:solidFill>
-            <a:srgbClr val="E3F1E7"/>
+            <a:srgbClr val="FCE9F0"/>
           </a:solidFill>
           <a:ln>
             <a:noFill/>
@@ -14945,7 +14945,7 @@
             <a:r>
               <a:rPr sz="1500" b="1" i="0">
                 <a:solidFill>
-                  <a:srgbClr val="166534"/>
+                  <a:srgbClr val="A5335F"/>
                 </a:solidFill>
                 <a:latin typeface="Verdana"/>
               </a:rPr>
@@ -15065,7 +15065,7 @@
             </a:avLst>
           </a:prstGeom>
           <a:solidFill>
-            <a:srgbClr val="E3F1E7"/>
+            <a:srgbClr val="FCE9F0"/>
           </a:solidFill>
           <a:ln>
             <a:noFill/>
@@ -15122,7 +15122,7 @@
             <a:r>
               <a:rPr sz="1500" b="1" i="0">
                 <a:solidFill>
-                  <a:srgbClr val="166534"/>
+                  <a:srgbClr val="A5335F"/>
                 </a:solidFill>
                 <a:latin typeface="Verdana"/>
               </a:rPr>
@@ -15242,7 +15242,7 @@
             </a:avLst>
           </a:prstGeom>
           <a:solidFill>
-            <a:srgbClr val="E3F1E7"/>
+            <a:srgbClr val="FCE9F0"/>
           </a:solidFill>
           <a:ln>
             <a:noFill/>
@@ -15299,7 +15299,7 @@
             <a:r>
               <a:rPr sz="1500" b="1" i="0">
                 <a:solidFill>
-                  <a:srgbClr val="166534"/>
+                  <a:srgbClr val="A5335F"/>
                 </a:solidFill>
                 <a:latin typeface="Verdana"/>
               </a:rPr>
